--- a/KAILA_Founder_Grade_Package/KAILA Founder Presentation/presentation/KAILA Founder-Grade Package Presentation.pptx
+++ b/KAILA_Founder_Grade_Package/KAILA Founder Presentation/presentation/KAILA Founder-Grade Package Presentation.pptx
@@ -4855,15 +4855,7 @@
                     <a:bodyPr/>
                     <a:lstStyle/>
                     <a:p>
-                      <a:pPr>
-                        <a:defRPr sz="1000">
-                          <a:solidFill>
-                            <a:srgbClr val="122A31"/>
-                          </a:solidFill>
-                        </a:defRPr>
-                      </a:pPr>
-                      <a:r>
-                        <a:rPr sz="1400"/>
+                      <a:r>
                         <a:t>Appliance repair</a:t>
                       </a:r>
                     </a:p>
@@ -4875,15 +4867,7 @@
                     <a:bodyPr/>
                     <a:lstStyle/>
                     <a:p>
-                      <a:pPr>
-                        <a:defRPr sz="1000">
-                          <a:solidFill>
-                            <a:srgbClr val="122A31"/>
-                          </a:solidFill>
-                        </a:defRPr>
-                      </a:pPr>
-                      <a:r>
-                        <a:rPr sz="1400"/>
+                      <a:r>
                         <a:t>Washing machines, refrigerators, aircon, fans, rice cookers, small appliances.</a:t>
                       </a:r>
                     </a:p>
@@ -4902,15 +4886,7 @@
                     <a:bodyPr/>
                     <a:lstStyle/>
                     <a:p>
-                      <a:pPr>
-                        <a:defRPr sz="1000">
-                          <a:solidFill>
-                            <a:srgbClr val="122A31"/>
-                          </a:solidFill>
-                        </a:defRPr>
-                      </a:pPr>
-                      <a:r>
-                        <a:rPr sz="1400"/>
+                      <a:r>
                         <a:t>Plumbing</a:t>
                       </a:r>
                     </a:p>
@@ -4922,15 +4898,7 @@
                     <a:bodyPr/>
                     <a:lstStyle/>
                     <a:p>
-                      <a:pPr>
-                        <a:defRPr sz="1000">
-                          <a:solidFill>
-                            <a:srgbClr val="122A31"/>
-                          </a:solidFill>
-                        </a:defRPr>
-                      </a:pPr>
-                      <a:r>
-                        <a:rPr sz="1400"/>
+                      <a:r>
                         <a:t>Leaks, clogged drains, faucet replacement, water lines, toilet repair.</a:t>
                       </a:r>
                     </a:p>
@@ -4949,15 +4917,7 @@
                     <a:bodyPr/>
                     <a:lstStyle/>
                     <a:p>
-                      <a:pPr>
-                        <a:defRPr sz="1000">
-                          <a:solidFill>
-                            <a:srgbClr val="122A31"/>
-                          </a:solidFill>
-                        </a:defRPr>
-                      </a:pPr>
-                      <a:r>
-                        <a:rPr sz="1400"/>
+                      <a:r>
                         <a:t>Electrical</a:t>
                       </a:r>
                     </a:p>
@@ -4969,15 +4929,7 @@
                     <a:bodyPr/>
                     <a:lstStyle/>
                     <a:p>
-                      <a:pPr>
-                        <a:defRPr sz="1000">
-                          <a:solidFill>
-                            <a:srgbClr val="122A31"/>
-                          </a:solidFill>
-                        </a:defRPr>
-                      </a:pPr>
-                      <a:r>
-                        <a:rPr sz="1400"/>
+                      <a:r>
                         <a:t>Lights, outlets, breakers, wiring assessment, installation, troubleshooting.</a:t>
                       </a:r>
                     </a:p>
@@ -4996,15 +4948,7 @@
                     <a:bodyPr/>
                     <a:lstStyle/>
                     <a:p>
-                      <a:pPr>
-                        <a:defRPr sz="1000">
-                          <a:solidFill>
-                            <a:srgbClr val="122A31"/>
-                          </a:solidFill>
-                        </a:defRPr>
-                      </a:pPr>
-                      <a:r>
-                        <a:rPr sz="1400"/>
+                      <a:r>
                         <a:t>Computer repair</a:t>
                       </a:r>
                     </a:p>
@@ -5016,15 +4960,7 @@
                     <a:bodyPr/>
                     <a:lstStyle/>
                     <a:p>
-                      <a:pPr>
-                        <a:defRPr sz="1000">
-                          <a:solidFill>
-                            <a:srgbClr val="122A31"/>
-                          </a:solidFill>
-                        </a:defRPr>
-                      </a:pPr>
-                      <a:r>
-                        <a:rPr sz="1400"/>
+                      <a:r>
                         <a:t>Formatting, virus removal, slow PC optimization, basic hardware replacement.</a:t>
                       </a:r>
                     </a:p>
@@ -5043,16 +4979,8 @@
                     <a:bodyPr/>
                     <a:lstStyle/>
                     <a:p>
-                      <a:pPr>
-                        <a:defRPr sz="1000">
-                          <a:solidFill>
-                            <a:srgbClr val="122A31"/>
-                          </a:solidFill>
-                        </a:defRPr>
-                      </a:pPr>
-                      <a:r>
-                        <a:rPr sz="1400"/>
-                        <a:t>Mechanical</a:t>
+                      <a:r>
+                        <a:t>Cellphone repair</a:t>
                       </a:r>
                     </a:p>
                   </a:txBody>
@@ -5063,16 +4991,8 @@
                     <a:bodyPr/>
                     <a:lstStyle/>
                     <a:p>
-                      <a:pPr>
-                        <a:defRPr sz="1000">
-                          <a:solidFill>
-                            <a:srgbClr val="122A31"/>
-                          </a:solidFill>
-                        </a:defRPr>
-                      </a:pPr>
-                      <a:r>
-                        <a:rPr sz="1400"/>
-                        <a:t>Motorcycles, small engines, basic vehicle concerns.</a:t>
+                      <a:r>
+                        <a:t>Screen, battery, charging port, speaker, camera, and basic software issues.</a:t>
                       </a:r>
                     </a:p>
                   </a:txBody>
@@ -5090,16 +5010,8 @@
                     <a:bodyPr/>
                     <a:lstStyle/>
                     <a:p>
-                      <a:pPr>
-                        <a:defRPr sz="1000">
-                          <a:solidFill>
-                            <a:srgbClr val="122A31"/>
-                          </a:solidFill>
-                        </a:defRPr>
-                      </a:pPr>
-                      <a:r>
-                        <a:rPr sz="1400"/>
-                        <a:t>Home maintenance</a:t>
+                      <a:r>
+                        <a:t>Mechanical</a:t>
                       </a:r>
                     </a:p>
                   </a:txBody>
@@ -5110,16 +5022,8 @@
                     <a:bodyPr/>
                     <a:lstStyle/>
                     <a:p>
-                      <a:pPr>
-                        <a:defRPr sz="1000">
-                          <a:solidFill>
-                            <a:srgbClr val="122A31"/>
-                          </a:solidFill>
-                        </a:defRPr>
-                      </a:pPr>
-                      <a:r>
-                        <a:rPr sz="1400"/>
-                        <a:t>Carpentry, welding, painting, installation, cleaning, odd jobs.</a:t>
+                      <a:r>
+                        <a:t>Motorcycles, small engines, basic vehicle concerns.</a:t>
                       </a:r>
                     </a:p>
                   </a:txBody>
@@ -5137,15 +5041,38 @@
                     <a:bodyPr/>
                     <a:lstStyle/>
                     <a:p>
-                      <a:pPr>
-                        <a:defRPr sz="1000">
-                          <a:solidFill>
-                            <a:srgbClr val="122A31"/>
-                          </a:solidFill>
-                        </a:defRPr>
-                      </a:pPr>
-                      <a:r>
-                        <a:rPr sz="1400"/>
+                      <a:r>
+                        <a:t>Home maintenance</a:t>
+                      </a:r>
+                    </a:p>
+                  </a:txBody>
+                  <a:tcPr/>
+                </a:tc>
+                <a:tc>
+                  <a:txBody>
+                    <a:bodyPr/>
+                    <a:lstStyle/>
+                    <a:p>
+                      <a:r>
+                        <a:t>Carpentry, welding, painting, installation, cleaning, odd jobs.</a:t>
+                      </a:r>
+                    </a:p>
+                  </a:txBody>
+                  <a:tcPr/>
+                </a:tc>
+                <a:extLst>
+                  <a:ext uri="{0D108BD9-81ED-4DB2-BD59-A6C34878D82A}">
+                    <a16:rowId xmlns:a16="http://schemas.microsoft.com/office/drawing/2014/main" val="10007"/>
+                  </a:ext>
+                </a:extLst>
+              </a:tr>
+              <a:tr h="560070">
+                <a:tc>
+                  <a:txBody>
+                    <a:bodyPr/>
+                    <a:lstStyle/>
+                    <a:p>
+                      <a:r>
                         <a:t>Digital services</a:t>
                       </a:r>
                     </a:p>
@@ -5157,15 +5084,7 @@
                     <a:bodyPr/>
                     <a:lstStyle/>
                     <a:p>
-                      <a:pPr>
-                        <a:defRPr sz="1000">
-                          <a:solidFill>
-                            <a:srgbClr val="122A31"/>
-                          </a:solidFill>
-                        </a:defRPr>
-                      </a:pPr>
-                      <a:r>
-                        <a:rPr sz="1400"/>
+                      <a:r>
                         <a:t>Graphic design, layout, tarpaulin design, basic digital work.</a:t>
                       </a:r>
                     </a:p>
@@ -10939,7 +10858,7 @@
                       </a:pPr>
                       <a:r>
                         <a:rPr sz="1400"/>
-                        <a:t>Run a manual version with Facebook, Google Forms, spreadsheet, and Messenger for 30 to 45 days.</a:t>
+                        <a:t>Run the browser MVP/native app plus Facebook concierge posting and Messenger follow-up for 30 to 45 days.</a:t>
                       </a:r>
                     </a:p>
                   </a:txBody>
@@ -14193,103 +14112,41 @@
               </a:defRPr>
             </a:pPr>
             <a:r>
-              <a:rPr sz="1900"/>
               <a:t>Home-based appliance repair technicians.</a:t>
             </a:r>
           </a:p>
           <a:p>
-            <a:pPr>
-              <a:spcAft>
-                <a:spcPts val="700"/>
-              </a:spcAft>
-              <a:defRPr sz="1700">
-                <a:solidFill>
-                  <a:srgbClr val="122A31"/>
-                </a:solidFill>
-              </a:defRPr>
-            </a:pPr>
-            <a:r>
-              <a:rPr sz="1900"/>
+            <a:r>
               <a:t>Electricians and plumbers who accept household jobs.</a:t>
             </a:r>
           </a:p>
           <a:p>
-            <a:pPr>
-              <a:spcAft>
-                <a:spcPts val="700"/>
-              </a:spcAft>
-              <a:defRPr sz="1700">
-                <a:solidFill>
-                  <a:srgbClr val="122A31"/>
-                </a:solidFill>
-              </a:defRPr>
-            </a:pPr>
-            <a:r>
-              <a:rPr sz="1900"/>
+            <a:r>
               <a:t>Motorcycle mechanics and small engine repair workers.</a:t>
             </a:r>
           </a:p>
           <a:p>
-            <a:pPr>
-              <a:spcAft>
-                <a:spcPts val="700"/>
-              </a:spcAft>
-              <a:defRPr sz="1700">
-                <a:solidFill>
-                  <a:srgbClr val="122A31"/>
-                </a:solidFill>
-              </a:defRPr>
-            </a:pPr>
-            <a:r>
-              <a:rPr sz="1900"/>
+            <a:r>
               <a:t>Computer repair technicians and software troubleshooters.</a:t>
             </a:r>
           </a:p>
           <a:p>
-            <a:pPr>
-              <a:spcAft>
-                <a:spcPts val="700"/>
-              </a:spcAft>
-              <a:defRPr sz="1700">
-                <a:solidFill>
-                  <a:srgbClr val="122A31"/>
-                </a:solidFill>
-              </a:defRPr>
-            </a:pPr>
-            <a:r>
-              <a:rPr sz="1900"/>
+            <a:r>
+              <a:t>Cellphone repair technicians and small phone repair stalls.</a:t>
+            </a:r>
+          </a:p>
+          <a:p>
+            <a:r>
               <a:t>Carpenters, welders, painters, and general maintenance workers.</a:t>
             </a:r>
           </a:p>
           <a:p>
-            <a:pPr>
-              <a:spcAft>
-                <a:spcPts val="700"/>
-              </a:spcAft>
-              <a:defRPr sz="1700">
-                <a:solidFill>
-                  <a:srgbClr val="122A31"/>
-                </a:solidFill>
-              </a:defRPr>
-            </a:pPr>
-            <a:r>
-              <a:rPr sz="1900"/>
+            <a:r>
               <a:t>Graphic designers, layout artists, tarpaulin designers, and digital freelancers.</a:t>
             </a:r>
           </a:p>
           <a:p>
-            <a:pPr>
-              <a:spcAft>
-                <a:spcPts val="700"/>
-              </a:spcAft>
-              <a:defRPr sz="1700">
-                <a:solidFill>
-                  <a:srgbClr val="122A31"/>
-                </a:solidFill>
-              </a:defRPr>
-            </a:pPr>
-            <a:r>
-              <a:rPr sz="1900"/>
+            <a:r>
               <a:t>Cleaning, gardening, errands, hauling, manpower providers, and small service shops.</a:t>
             </a:r>
           </a:p>
@@ -17323,15 +17180,7 @@
                     <a:bodyPr/>
                     <a:lstStyle/>
                     <a:p>
-                      <a:pPr>
-                        <a:defRPr sz="900">
-                          <a:solidFill>
-                            <a:srgbClr val="122A31"/>
-                          </a:solidFill>
-                        </a:defRPr>
-                      </a:pPr>
-                      <a:r>
-                        <a:rPr sz="1400"/>
+                      <a:r>
                         <a:t>Appliance repair</a:t>
                       </a:r>
                     </a:p>
@@ -17343,16 +17192,8 @@
                     <a:bodyPr/>
                     <a:lstStyle/>
                     <a:p>
-                      <a:pPr>
-                        <a:defRPr sz="900">
-                          <a:solidFill>
-                            <a:srgbClr val="122A31"/>
-                          </a:solidFill>
-                        </a:defRPr>
-                      </a:pPr>
-                      <a:r>
-                        <a:rPr sz="1400"/>
-                        <a:t>8</a:t>
+                      <a:r>
+                        <a:t>7</a:t>
                       </a:r>
                     </a:p>
                   </a:txBody>
@@ -17363,16 +17204,8 @@
                     <a:bodyPr/>
                     <a:lstStyle/>
                     <a:p>
-                      <a:pPr>
-                        <a:defRPr sz="900">
-                          <a:solidFill>
-                            <a:srgbClr val="122A31"/>
-                          </a:solidFill>
-                        </a:defRPr>
-                      </a:pPr>
-                      <a:r>
-                        <a:rPr sz="1400"/>
-                        <a:t>15</a:t>
+                      <a:r>
+                        <a:t>12</a:t>
                       </a:r>
                     </a:p>
                   </a:txBody>
@@ -17383,15 +17216,7 @@
                     <a:bodyPr/>
                     <a:lstStyle/>
                     <a:p>
-                      <a:pPr>
-                        <a:defRPr sz="900">
-                          <a:solidFill>
-                            <a:srgbClr val="122A31"/>
-                          </a:solidFill>
-                        </a:defRPr>
-                      </a:pPr>
-                      <a:r>
-                        <a:rPr sz="1400"/>
+                      <a:r>
                         <a:t>High household demand and urgent repair needs.</a:t>
                       </a:r>
                     </a:p>
@@ -17410,15 +17235,7 @@
                     <a:bodyPr/>
                     <a:lstStyle/>
                     <a:p>
-                      <a:pPr>
-                        <a:defRPr sz="900">
-                          <a:solidFill>
-                            <a:srgbClr val="122A31"/>
-                          </a:solidFill>
-                        </a:defRPr>
-                      </a:pPr>
-                      <a:r>
-                        <a:rPr sz="1400"/>
+                      <a:r>
                         <a:t>Plumbing</a:t>
                       </a:r>
                     </a:p>
@@ -17430,15 +17247,7 @@
                     <a:bodyPr/>
                     <a:lstStyle/>
                     <a:p>
-                      <a:pPr>
-                        <a:defRPr sz="900">
-                          <a:solidFill>
-                            <a:srgbClr val="122A31"/>
-                          </a:solidFill>
-                        </a:defRPr>
-                      </a:pPr>
-                      <a:r>
-                        <a:rPr sz="1400"/>
+                      <a:r>
                         <a:t>6</a:t>
                       </a:r>
                     </a:p>
@@ -17450,16 +17259,8 @@
                     <a:bodyPr/>
                     <a:lstStyle/>
                     <a:p>
-                      <a:pPr>
-                        <a:defRPr sz="900">
-                          <a:solidFill>
-                            <a:srgbClr val="122A31"/>
-                          </a:solidFill>
-                        </a:defRPr>
-                      </a:pPr>
-                      <a:r>
-                        <a:rPr sz="1400"/>
-                        <a:t>12</a:t>
+                      <a:r>
+                        <a:t>10</a:t>
                       </a:r>
                     </a:p>
                   </a:txBody>
@@ -17470,15 +17271,7 @@
                     <a:bodyPr/>
                     <a:lstStyle/>
                     <a:p>
-                      <a:pPr>
-                        <a:defRPr sz="900">
-                          <a:solidFill>
-                            <a:srgbClr val="122A31"/>
-                          </a:solidFill>
-                        </a:defRPr>
-                      </a:pPr>
-                      <a:r>
-                        <a:rPr sz="1400"/>
+                      <a:r>
                         <a:t>Leak and clog problems require fast response.</a:t>
                       </a:r>
                     </a:p>
@@ -17497,15 +17290,7 @@
                     <a:bodyPr/>
                     <a:lstStyle/>
                     <a:p>
-                      <a:pPr>
-                        <a:defRPr sz="900">
-                          <a:solidFill>
-                            <a:srgbClr val="122A31"/>
-                          </a:solidFill>
-                        </a:defRPr>
-                      </a:pPr>
-                      <a:r>
-                        <a:rPr sz="1400"/>
+                      <a:r>
                         <a:t>Electrical</a:t>
                       </a:r>
                     </a:p>
@@ -17517,15 +17302,7 @@
                     <a:bodyPr/>
                     <a:lstStyle/>
                     <a:p>
-                      <a:pPr>
-                        <a:defRPr sz="900">
-                          <a:solidFill>
-                            <a:srgbClr val="122A31"/>
-                          </a:solidFill>
-                        </a:defRPr>
-                      </a:pPr>
-                      <a:r>
-                        <a:rPr sz="1400"/>
+                      <a:r>
                         <a:t>6</a:t>
                       </a:r>
                     </a:p>
@@ -17537,16 +17314,8 @@
                     <a:bodyPr/>
                     <a:lstStyle/>
                     <a:p>
-                      <a:pPr>
-                        <a:defRPr sz="900">
-                          <a:solidFill>
-                            <a:srgbClr val="122A31"/>
-                          </a:solidFill>
-                        </a:defRPr>
-                      </a:pPr>
-                      <a:r>
-                        <a:rPr sz="1400"/>
-                        <a:t>12</a:t>
+                      <a:r>
+                        <a:t>10</a:t>
                       </a:r>
                     </a:p>
                   </a:txBody>
@@ -17557,15 +17326,7 @@
                     <a:bodyPr/>
                     <a:lstStyle/>
                     <a:p>
-                      <a:pPr>
-                        <a:defRPr sz="900">
-                          <a:solidFill>
-                            <a:srgbClr val="122A31"/>
-                          </a:solidFill>
-                        </a:defRPr>
-                      </a:pPr>
-                      <a:r>
-                        <a:rPr sz="1400"/>
+                      <a:r>
                         <a:t>Safety-sensitive and common household need.</a:t>
                       </a:r>
                     </a:p>
@@ -17584,15 +17345,7 @@
                     <a:bodyPr/>
                     <a:lstStyle/>
                     <a:p>
-                      <a:pPr>
-                        <a:defRPr sz="900">
-                          <a:solidFill>
-                            <a:srgbClr val="122A31"/>
-                          </a:solidFill>
-                        </a:defRPr>
-                      </a:pPr>
-                      <a:r>
-                        <a:rPr sz="1400"/>
+                      <a:r>
                         <a:t>Computer repair</a:t>
                       </a:r>
                     </a:p>
@@ -17604,15 +17357,7 @@
                     <a:bodyPr/>
                     <a:lstStyle/>
                     <a:p>
-                      <a:pPr>
-                        <a:defRPr sz="900">
-                          <a:solidFill>
-                            <a:srgbClr val="122A31"/>
-                          </a:solidFill>
-                        </a:defRPr>
-                      </a:pPr>
-                      <a:r>
-                        <a:rPr sz="1400"/>
+                      <a:r>
                         <a:t>5</a:t>
                       </a:r>
                     </a:p>
@@ -17624,16 +17369,8 @@
                     <a:bodyPr/>
                     <a:lstStyle/>
                     <a:p>
-                      <a:pPr>
-                        <a:defRPr sz="900">
-                          <a:solidFill>
-                            <a:srgbClr val="122A31"/>
-                          </a:solidFill>
-                        </a:defRPr>
-                      </a:pPr>
-                      <a:r>
-                        <a:rPr sz="1400"/>
-                        <a:t>10</a:t>
+                      <a:r>
+                        <a:t>8</a:t>
                       </a:r>
                     </a:p>
                   </a:txBody>
@@ -17644,15 +17381,7 @@
                     <a:bodyPr/>
                     <a:lstStyle/>
                     <a:p>
-                      <a:pPr>
-                        <a:defRPr sz="900">
-                          <a:solidFill>
-                            <a:srgbClr val="122A31"/>
-                          </a:solidFill>
-                        </a:defRPr>
-                      </a:pPr>
-                      <a:r>
-                        <a:rPr sz="1400"/>
+                      <a:r>
                         <a:t>Strong fit with students, offices, and households.</a:t>
                       </a:r>
                     </a:p>
@@ -17671,16 +17400,8 @@
                     <a:bodyPr/>
                     <a:lstStyle/>
                     <a:p>
-                      <a:pPr>
-                        <a:defRPr sz="900">
-                          <a:solidFill>
-                            <a:srgbClr val="122A31"/>
-                          </a:solidFill>
-                        </a:defRPr>
-                      </a:pPr>
-                      <a:r>
-                        <a:rPr sz="1400"/>
-                        <a:t>Mechanical / motorcycle</a:t>
+                      <a:r>
+                        <a:t>Cellphone repair</a:t>
                       </a:r>
                     </a:p>
                   </a:txBody>
@@ -17691,16 +17412,8 @@
                     <a:bodyPr/>
                     <a:lstStyle/>
                     <a:p>
-                      <a:pPr>
-                        <a:defRPr sz="900">
-                          <a:solidFill>
-                            <a:srgbClr val="122A31"/>
-                          </a:solidFill>
-                        </a:defRPr>
-                      </a:pPr>
-                      <a:r>
-                        <a:rPr sz="1400"/>
-                        <a:t>5</a:t>
+                      <a:r>
+                        <a:t>6</a:t>
                       </a:r>
                     </a:p>
                   </a:txBody>
@@ -17711,15 +17424,7 @@
                     <a:bodyPr/>
                     <a:lstStyle/>
                     <a:p>
-                      <a:pPr>
-                        <a:defRPr sz="900">
-                          <a:solidFill>
-                            <a:srgbClr val="122A31"/>
-                          </a:solidFill>
-                        </a:defRPr>
-                      </a:pPr>
-                      <a:r>
-                        <a:rPr sz="1400"/>
+                      <a:r>
                         <a:t>10</a:t>
                       </a:r>
                     </a:p>
@@ -17731,16 +17436,8 @@
                     <a:bodyPr/>
                     <a:lstStyle/>
                     <a:p>
-                      <a:pPr>
-                        <a:defRPr sz="900">
-                          <a:solidFill>
-                            <a:srgbClr val="122A31"/>
-                          </a:solidFill>
-                        </a:defRPr>
-                      </a:pPr>
-                      <a:r>
-                        <a:rPr sz="1400"/>
-                        <a:t>Common in local communities.</a:t>
+                      <a:r>
+                        <a:t>Frequent phone screen, battery, charging, and software issues.</a:t>
                       </a:r>
                     </a:p>
                   </a:txBody>
@@ -17758,16 +17455,8 @@
                     <a:bodyPr/>
                     <a:lstStyle/>
                     <a:p>
-                      <a:pPr>
-                        <a:defRPr sz="900">
-                          <a:solidFill>
-                            <a:srgbClr val="122A31"/>
-                          </a:solidFill>
-                        </a:defRPr>
-                      </a:pPr>
-                      <a:r>
-                        <a:rPr sz="1400"/>
-                        <a:t>Carpentry / home maintenance</a:t>
+                      <a:r>
+                        <a:t>Mechanical / motorcycle</a:t>
                       </a:r>
                     </a:p>
                   </a:txBody>
@@ -17778,15 +17467,7 @@
                     <a:bodyPr/>
                     <a:lstStyle/>
                     <a:p>
-                      <a:pPr>
-                        <a:defRPr sz="900">
-                          <a:solidFill>
-                            <a:srgbClr val="122A31"/>
-                          </a:solidFill>
-                        </a:defRPr>
-                      </a:pPr>
-                      <a:r>
-                        <a:rPr sz="1400"/>
+                      <a:r>
                         <a:t>5</a:t>
                       </a:r>
                     </a:p>
@@ -17798,16 +17479,8 @@
                     <a:bodyPr/>
                     <a:lstStyle/>
                     <a:p>
-                      <a:pPr>
-                        <a:defRPr sz="900">
-                          <a:solidFill>
-                            <a:srgbClr val="122A31"/>
-                          </a:solidFill>
-                        </a:defRPr>
-                      </a:pPr>
-                      <a:r>
-                        <a:rPr sz="1400"/>
-                        <a:t>10</a:t>
+                      <a:r>
+                        <a:t>8</a:t>
                       </a:r>
                     </a:p>
                   </a:txBody>
@@ -17818,16 +17491,8 @@
                     <a:bodyPr/>
                     <a:lstStyle/>
                     <a:p>
-                      <a:pPr>
-                        <a:defRPr sz="900">
-                          <a:solidFill>
-                            <a:srgbClr val="122A31"/>
-                          </a:solidFill>
-                        </a:defRPr>
-                      </a:pPr>
-                      <a:r>
-                        <a:rPr sz="1400"/>
-                        <a:t>Frequent small repair and improvement jobs.</a:t>
+                      <a:r>
+                        <a:t>Common in local communities.</a:t>
                       </a:r>
                     </a:p>
                   </a:txBody>
@@ -17845,16 +17510,8 @@
                     <a:bodyPr/>
                     <a:lstStyle/>
                     <a:p>
-                      <a:pPr>
-                        <a:defRPr sz="900">
-                          <a:solidFill>
-                            <a:srgbClr val="122A31"/>
-                          </a:solidFill>
-                        </a:defRPr>
-                      </a:pPr>
-                      <a:r>
-                        <a:rPr sz="1400"/>
-                        <a:t>Graphic / digital services</a:t>
+                      <a:r>
+                        <a:t>Carpentry / home maintenance</a:t>
                       </a:r>
                     </a:p>
                   </a:txBody>
@@ -17865,15 +17522,7 @@
                     <a:bodyPr/>
                     <a:lstStyle/>
                     <a:p>
-                      <a:pPr>
-                        <a:defRPr sz="900">
-                          <a:solidFill>
-                            <a:srgbClr val="122A31"/>
-                          </a:solidFill>
-                        </a:defRPr>
-                      </a:pPr>
-                      <a:r>
-                        <a:rPr sz="1400"/>
+                      <a:r>
                         <a:t>5</a:t>
                       </a:r>
                     </a:p>
@@ -17885,16 +17534,8 @@
                     <a:bodyPr/>
                     <a:lstStyle/>
                     <a:p>
-                      <a:pPr>
-                        <a:defRPr sz="900">
-                          <a:solidFill>
-                            <a:srgbClr val="122A31"/>
-                          </a:solidFill>
-                        </a:defRPr>
-                      </a:pPr>
-                      <a:r>
-                        <a:rPr sz="1400"/>
-                        <a:t>10</a:t>
+                      <a:r>
+                        <a:t>8</a:t>
                       </a:r>
                     </a:p>
                   </a:txBody>
@@ -17905,16 +17546,8 @@
                     <a:bodyPr/>
                     <a:lstStyle/>
                     <a:p>
-                      <a:pPr>
-                        <a:defRPr sz="900">
-                          <a:solidFill>
-                            <a:srgbClr val="122A31"/>
-                          </a:solidFill>
-                        </a:defRPr>
-                      </a:pPr>
-                      <a:r>
-                        <a:rPr sz="1400"/>
-                        <a:t>Useful for local events, businesses, and students.</a:t>
+                      <a:r>
+                        <a:t>Frequent small repair and improvement jobs.</a:t>
                       </a:r>
                     </a:p>
                   </a:txBody>
@@ -17932,15 +17565,62 @@
                     <a:bodyPr/>
                     <a:lstStyle/>
                     <a:p>
-                      <a:pPr>
-                        <a:defRPr sz="900">
-                          <a:solidFill>
-                            <a:srgbClr val="122A31"/>
-                          </a:solidFill>
-                        </a:defRPr>
-                      </a:pPr>
-                      <a:r>
-                        <a:rPr sz="1400"/>
+                      <a:r>
+                        <a:t>Graphic / digital services</a:t>
+                      </a:r>
+                    </a:p>
+                  </a:txBody>
+                  <a:tcPr/>
+                </a:tc>
+                <a:tc>
+                  <a:txBody>
+                    <a:bodyPr/>
+                    <a:lstStyle/>
+                    <a:p>
+                      <a:r>
+                        <a:t>4</a:t>
+                      </a:r>
+                    </a:p>
+                  </a:txBody>
+                  <a:tcPr/>
+                </a:tc>
+                <a:tc>
+                  <a:txBody>
+                    <a:bodyPr/>
+                    <a:lstStyle/>
+                    <a:p>
+                      <a:r>
+                        <a:t>7</a:t>
+                      </a:r>
+                    </a:p>
+                  </a:txBody>
+                  <a:tcPr/>
+                </a:tc>
+                <a:tc>
+                  <a:txBody>
+                    <a:bodyPr/>
+                    <a:lstStyle/>
+                    <a:p>
+                      <a:r>
+                        <a:t>Useful for local events, businesses, and students.</a:t>
+                      </a:r>
+                    </a:p>
+                  </a:txBody>
+                  <a:tcPr/>
+                </a:tc>
+                <a:extLst>
+                  <a:ext uri="{0D108BD9-81ED-4DB2-BD59-A6C34878D82A}">
+                    <a16:rowId xmlns:a16="http://schemas.microsoft.com/office/drawing/2014/main" val="10008"/>
+                  </a:ext>
+                </a:extLst>
+              </a:tr>
+              <a:tr h="497840">
+                <a:tc>
+                  <a:txBody>
+                    <a:bodyPr/>
+                    <a:lstStyle/>
+                    <a:p>
+                      <a:r>
                         <a:t>General odd jobs</a:t>
                       </a:r>
                     </a:p>
@@ -17952,16 +17632,8 @@
                     <a:bodyPr/>
                     <a:lstStyle/>
                     <a:p>
-                      <a:pPr>
-                        <a:defRPr sz="900">
-                          <a:solidFill>
-                            <a:srgbClr val="122A31"/>
-                          </a:solidFill>
-                        </a:defRPr>
-                      </a:pPr>
-                      <a:r>
-                        <a:rPr sz="1400"/>
-                        <a:t>10</a:t>
+                      <a:r>
+                        <a:t>6</a:t>
                       </a:r>
                     </a:p>
                   </a:txBody>
@@ -17972,16 +17644,8 @@
                     <a:bodyPr/>
                     <a:lstStyle/>
                     <a:p>
-                      <a:pPr>
-                        <a:defRPr sz="900">
-                          <a:solidFill>
-                            <a:srgbClr val="122A31"/>
-                          </a:solidFill>
-                        </a:defRPr>
-                      </a:pPr>
-                      <a:r>
-                        <a:rPr sz="1400"/>
-                        <a:t>20</a:t>
+                      <a:r>
+                        <a:t>12</a:t>
                       </a:r>
                     </a:p>
                   </a:txBody>
@@ -17992,15 +17656,7 @@
                     <a:bodyPr/>
                     <a:lstStyle/>
                     <a:p>
-                      <a:pPr>
-                        <a:defRPr sz="900">
-                          <a:solidFill>
-                            <a:srgbClr val="122A31"/>
-                          </a:solidFill>
-                        </a:defRPr>
-                      </a:pPr>
-                      <a:r>
-                        <a:rPr sz="1400"/>
+                      <a:r>
                         <a:t>Flexible supply for miscellaneous needs.</a:t>
                       </a:r>
                     </a:p>
@@ -21205,88 +20861,32 @@
               </a:defRPr>
             </a:pPr>
             <a:r>
-              <a:rPr sz="1900"/>
               <a:t>In-app payments.</a:t>
             </a:r>
           </a:p>
           <a:p>
-            <a:pPr>
-              <a:spcAft>
-                <a:spcPts val="700"/>
-              </a:spcAft>
-              <a:defRPr sz="1700">
-                <a:solidFill>
-                  <a:srgbClr val="122A31"/>
-                </a:solidFill>
-              </a:defRPr>
-            </a:pPr>
-            <a:r>
-              <a:rPr sz="1900"/>
+            <a:r>
               <a:t>GPS live tracking.</a:t>
             </a:r>
           </a:p>
           <a:p>
-            <a:pPr>
-              <a:spcAft>
-                <a:spcPts val="700"/>
-              </a:spcAft>
-              <a:defRPr sz="1700">
-                <a:solidFill>
-                  <a:srgbClr val="122A31"/>
-                </a:solidFill>
-              </a:defRPr>
-            </a:pPr>
-            <a:r>
-              <a:rPr sz="1900"/>
-              <a:t>Native mobile apps.</a:t>
-            </a:r>
-          </a:p>
-          <a:p>
-            <a:pPr>
-              <a:spcAft>
-                <a:spcPts val="700"/>
-              </a:spcAft>
-              <a:defRPr sz="1700">
-                <a:solidFill>
-                  <a:srgbClr val="122A31"/>
-                </a:solidFill>
-              </a:defRPr>
-            </a:pPr>
-            <a:r>
-              <a:rPr sz="1900"/>
+            <a:r>
+              <a:t>Native app polish beyond the current wrapper.</a:t>
+            </a:r>
+          </a:p>
+          <a:p>
+            <a:r>
               <a:t>Complex AI matching.</a:t>
             </a:r>
           </a:p>
           <a:p>
-            <a:pPr>
-              <a:spcAft>
-                <a:spcPts val="700"/>
-              </a:spcAft>
-              <a:defRPr sz="1700">
-                <a:solidFill>
-                  <a:srgbClr val="122A31"/>
-                </a:solidFill>
-              </a:defRPr>
-            </a:pPr>
-            <a:r>
-              <a:rPr sz="1900"/>
+            <a:r>
               <a:t>Large-scale marketplace automation.</a:t>
             </a:r>
           </a:p>
           <a:p>
-            <a:pPr>
-              <a:spcAft>
-                <a:spcPts val="700"/>
-              </a:spcAft>
-              <a:defRPr sz="1700">
-                <a:solidFill>
-                  <a:srgbClr val="122A31"/>
-                </a:solidFill>
-              </a:defRPr>
-            </a:pPr>
-            <a:r>
-              <a:rPr sz="1900"/>
-              <a:t>These can be considered only after validation proves the core behavior.</a:t>
+            <a:r>
+              <a:t>Defer heavy automation and paid infrastructure until validation proves the core behavior.</a:t>
             </a:r>
           </a:p>
         </p:txBody>
@@ -22653,71 +22253,26 @@
               </a:defRPr>
             </a:pPr>
             <a:r>
-              <a:rPr sz="1900"/>
-              <a:t>Business validation comes before full app development.</a:t>
-            </a:r>
-          </a:p>
-          <a:p>
-            <a:pPr>
-              <a:spcAft>
-                <a:spcPts val="700"/>
-              </a:spcAft>
-              <a:defRPr sz="1700">
-                <a:solidFill>
-                  <a:srgbClr val="122A31"/>
-                </a:solidFill>
-              </a:defRPr>
-            </a:pPr>
-            <a:r>
-              <a:rPr sz="1900"/>
+              <a:t>Business validation continues through the live MVP and concierge pilot.</a:t>
+            </a:r>
+          </a:p>
+          <a:p>
+            <a:r>
               <a:t>No founder should be treated as merely a helper if expected to carry core responsibility.</a:t>
             </a:r>
           </a:p>
           <a:p>
-            <a:pPr>
-              <a:spcAft>
-                <a:spcPts val="700"/>
-              </a:spcAft>
-              <a:defRPr sz="1700">
-                <a:solidFill>
-                  <a:srgbClr val="122A31"/>
-                </a:solidFill>
-              </a:defRPr>
-            </a:pPr>
-            <a:r>
-              <a:rPr sz="1900"/>
+            <a:r>
               <a:t>Ownership should reflect contribution, risk, time commitment, and long-term responsibility.</a:t>
             </a:r>
           </a:p>
           <a:p>
-            <a:pPr>
-              <a:spcAft>
-                <a:spcPts val="700"/>
-              </a:spcAft>
-              <a:defRPr sz="1700">
-                <a:solidFill>
-                  <a:srgbClr val="122A31"/>
-                </a:solidFill>
-              </a:defRPr>
-            </a:pPr>
-            <a:r>
-              <a:rPr sz="1900"/>
+            <a:r>
               <a:t>Important decisions should be documented.</a:t>
             </a:r>
           </a:p>
           <a:p>
-            <a:pPr>
-              <a:spcAft>
-                <a:spcPts val="700"/>
-              </a:spcAft>
-              <a:defRPr sz="1700">
-                <a:solidFill>
-                  <a:srgbClr val="122A31"/>
-                </a:solidFill>
-              </a:defRPr>
-            </a:pPr>
-            <a:r>
-              <a:rPr sz="1900"/>
+            <a:r>
               <a:t>The team should protect trust, fairness, and transparency from the beginning.</a:t>
             </a:r>
           </a:p>
@@ -24506,7 +24061,7 @@
                       </a:pPr>
                       <a:r>
                         <a:rPr sz="1400"/>
-                        <a:t>Monthly fixed operating cost</a:t>
+                        <a:t>Monthly lean operating cost</a:t>
                       </a:r>
                     </a:p>
                   </a:txBody>
@@ -24526,7 +24081,7 @@
                       </a:pPr>
                       <a:r>
                         <a:rPr sz="1400"/>
-                        <a:t>PHP 20,000</a:t>
+                        <a:t>PHP 2,500</a:t>
                       </a:r>
                     </a:p>
                   </a:txBody>
@@ -25296,40 +24851,17 @@
               </a:defRPr>
             </a:pPr>
             <a:r>
-              <a:rPr sz="1900"/>
-              <a:t>The field forms are designed for validation and early operations.</a:t>
-            </a:r>
-          </a:p>
-          <a:p>
-            <a:pPr>
-              <a:spcAft>
-                <a:spcPts val="700"/>
-              </a:spcAft>
-              <a:defRPr sz="1700">
-                <a:solidFill>
-                  <a:srgbClr val="122A31"/>
-                </a:solidFill>
-              </a:defRPr>
-            </a:pPr>
-            <a:r>
-              <a:rPr sz="1900"/>
-              <a:t>They can be printed or copied into Google Forms and Google Sheets.</a:t>
-            </a:r>
-          </a:p>
-          <a:p>
-            <a:pPr>
-              <a:spcAft>
-                <a:spcPts val="700"/>
-              </a:spcAft>
-              <a:defRPr sz="1700">
-                <a:solidFill>
-                  <a:srgbClr val="122A31"/>
-                </a:solidFill>
-              </a:defRPr>
-            </a:pPr>
-            <a:r>
-              <a:rPr sz="1900"/>
-              <a:t>The goal is to collect real client, provider, request, job, and meeting data before full development.</a:t>
+              <a:t>The survey and interview forms are built into the KAILA app for validation and early operations.</a:t>
+            </a:r>
+          </a:p>
+          <a:p>
+            <a:r>
+              <a:t>Printable or Google Form copies can remain as backup.</a:t>
+            </a:r>
+          </a:p>
+          <a:p>
+            <a:r>
+              <a:t>The goal is to collect real client, provider, request, job, and meeting data during the Facebook concierge pilot.</a:t>
             </a:r>
           </a:p>
         </p:txBody>
@@ -28005,7 +27537,7 @@
                       </a:pPr>
                       <a:r>
                         <a:rPr sz="1400"/>
-                        <a:t>Manual marketplace test using forms, spreadsheets, Facebook, and Messenger before full app build.</a:t>
+                        <a:t>Marketplace test using the existing app plus Facebook page posts, Messenger follow-up, and manual operations support.</a:t>
                       </a:r>
                     </a:p>
                   </a:txBody>
